--- a/public/fun/pack/pptx/reviewpro/보장점검양식프리미엄_15_사업장점검_에메랄드브라스.pptx
+++ b/public/fun/pack/pptx/reviewpro/보장점검양식프리미엄_15_사업장점검_에메랄드브라스.pptx
@@ -112,12 +112,12 @@
   <p:extLst>
     <p:ext uri="{521415D9-36F7-43E2-AB2F-B90AF26B5E84}">
       <p14:sectionLst xmlns:p14="http://schemas.microsoft.com/office/powerpoint/2010/main">
-        <p14:section name="시작" id="{A6E77AE0-5B3A-4BC7-BFB3-1442357790F7}">
+        <p14:section name="시작" id="{7744269B-F7A6-4A58-81CE-0E0D217E4FE9}">
           <p14:sldIdLst>
             <p14:sldId id="256"/>
           </p14:sldIdLst>
         </p14:section>
-        <p14:section name="본문" id="{64D80E50-B39B-4509-B150-573F4A3D31C8}">
+        <p14:section name="본문" id="{3DB668F5-D963-4B06-B95F-E509B966EFE7}">
           <p14:sldIdLst>
             <p14:sldId id="257"/>
             <p14:sldId id="258"/>
@@ -1985,7 +1985,7 @@
             </a:lvl1pPr>
           </a:lstStyle>
           <a:p>
-            <a:fld id="{FD977A62-D730-4E63-86A3-C12734F3AAA8}" type="slidenum">
+            <a:fld id="{9D7B85D4-7DB0-4078-9BAE-020E9B170464}" type="slidenum">
               <a:rPr lang="en-US"/>
               <a:t>‹#›</a:t>
             </a:fld>
@@ -3415,7 +3415,7 @@
             </a:lvl1pPr>
           </a:lstStyle>
           <a:p>
-            <a:fld id="{A6288361-3B18-4DB3-9502-C7B9DAFCF955}" type="slidenum">
+            <a:fld id="{78A0EE31-99E6-4597-90D3-3E48C977B4AF}" type="slidenum">
               <a:rPr lang="en-US"/>
               <a:t>‹#›</a:t>
             </a:fld>
@@ -4417,7 +4417,7 @@
             </a:lvl1pPr>
           </a:lstStyle>
           <a:p>
-            <a:fld id="{86A09CA9-E66D-46F8-9A76-5DAD082D871B}" type="slidenum">
+            <a:fld id="{BA5F9D69-40EB-4F52-8BD6-C41F9894386D}" type="slidenum">
               <a:rPr lang="en-US"/>
               <a:t>‹#›</a:t>
             </a:fld>
@@ -5580,7 +5580,7 @@
           <a:p>
             <a:r>
               <a:rPr lang="ko-KR"/>
-              <a:t>사업장 점검 · 0000. 00. 00</a:t>
+              <a:t>사업장 점검 · 날짜 입력</a:t>
             </a:r>
           </a:p>
           <a:p>
@@ -5671,7 +5671,7 @@
           <a:bodyPr/>
           <a:lstStyle/>
           <a:p>
-            <a:fld id="{DF5F77F2-27F9-40C0-AF22-BFB044F61C38}" type="slidenum">
+            <a:fld id="{C13AC239-7867-4E72-AB4F-28C4705770E0}" type="slidenum">
               <a:rPr lang="en-US"/>
               <a:t>‹#›</a:t>
             </a:fld>
@@ -6187,7 +6187,7 @@
           <a:bodyPr/>
           <a:lstStyle/>
           <a:p>
-            <a:fld id="{EAC97395-840F-4D68-8E81-B635FCB392CC}" type="slidenum">
+            <a:fld id="{8CC72F3D-AC85-42FC-99E8-2ADAA63E37F8}" type="slidenum">
               <a:rPr lang="en-US"/>
               <a:t>‹#›</a:t>
             </a:fld>
@@ -7693,7 +7693,7 @@
           <a:bodyPr/>
           <a:lstStyle/>
           <a:p>
-            <a:fld id="{53303E8C-C5E5-4213-B803-E3D1BBA764B1}" type="slidenum">
+            <a:fld id="{AFE6AB4A-80D9-40EE-AC85-A5820645D80A}" type="slidenum">
               <a:rPr lang="en-US"/>
               <a:t>‹#›</a:t>
             </a:fld>
@@ -9243,7 +9243,7 @@
           <a:bodyPr/>
           <a:lstStyle/>
           <a:p>
-            <a:fld id="{A1486E77-942D-422E-9F1B-7B3EE1E148EE}" type="slidenum">
+            <a:fld id="{CF95CE81-96C7-418B-B4C7-8E9EEA69F4AB}" type="slidenum">
               <a:rPr lang="en-US"/>
               <a:t>‹#›</a:t>
             </a:fld>
@@ -10120,7 +10120,7 @@
           <a:bodyPr/>
           <a:lstStyle/>
           <a:p>
-            <a:fld id="{B6A04DD4-4290-4C33-B8B2-9AA7EFB1E0B8}" type="slidenum">
+            <a:fld id="{95E031E0-FC32-4FC2-8728-8BB874DD5CDA}" type="slidenum">
               <a:rPr lang="en-US"/>
               <a:t>‹#›</a:t>
             </a:fld>
